--- a/docs/how-to-advance-tasks-efficiently-ja.pptx
+++ b/docs/how-to-advance-tasks-efficiently-ja.pptx
@@ -3756,8 +3756,12 @@
           <a:bodyPr/>
           <a:p>
             <a:r>
+              <a:rPr lang="ja-JP" altLang="en-US" sz="2400"/>
+              <a:t>https://github.com/dualface/kander</a:t>
+            </a:r>
+            <a:r>
               <a:rPr lang="ja-JP" altLang="en-US" sz="2800"/>
-              <a:t>https://github.com/dualface/kander から最新版をダウンロード</a:t>
+              <a:t> から最新版をダウンロード</a:t>
             </a:r>
             <a:endParaRPr lang="ja-JP" altLang="en-US" sz="2800"/>
           </a:p>
@@ -3779,7 +3783,7 @@
       </p:sp>
     </p:spTree>
     <p:custDataLst>
-      <p:tags r:id="rId4"/>
+      <p:tags r:id="rId3"/>
     </p:custDataLst>
   </p:cSld>
   <p:clrMapOvr>
